--- a/Lectures/Week 12/12. Probability.pptx
+++ b/Lectures/Week 12/12. Probability.pptx
@@ -253,7 +253,7 @@
           </a:lstStyle>
           <a:p>
             <a:fld id="{2344C2F9-3871-774B-ABA3-1726178C4883}" type="datetimeFigureOut">
-              <a:t>11/5/20</a:t>
+              <a:t>12/2/20</a:t>
             </a:fld>
             <a:endParaRPr lang="en-US"/>
           </a:p>
@@ -769,7 +769,7 @@
           <a:lstStyle/>
           <a:p>
             <a:fld id="{2E3CE03B-8C24-BD41-A48C-B23475D09813}" type="datetimeFigureOut">
-              <a:t>11/5/20</a:t>
+              <a:t>12/2/20</a:t>
             </a:fld>
             <a:endParaRPr lang="en-US"/>
           </a:p>
@@ -965,7 +965,7 @@
           <a:lstStyle/>
           <a:p>
             <a:fld id="{2E3CE03B-8C24-BD41-A48C-B23475D09813}" type="datetimeFigureOut">
-              <a:t>11/5/20</a:t>
+              <a:t>12/2/20</a:t>
             </a:fld>
             <a:endParaRPr lang="en-US"/>
           </a:p>
@@ -1171,7 +1171,7 @@
           <a:lstStyle/>
           <a:p>
             <a:fld id="{2E3CE03B-8C24-BD41-A48C-B23475D09813}" type="datetimeFigureOut">
-              <a:t>11/5/20</a:t>
+              <a:t>12/2/20</a:t>
             </a:fld>
             <a:endParaRPr lang="en-US"/>
           </a:p>
@@ -1367,7 +1367,7 @@
           <a:lstStyle/>
           <a:p>
             <a:fld id="{2E3CE03B-8C24-BD41-A48C-B23475D09813}" type="datetimeFigureOut">
-              <a:t>11/5/20</a:t>
+              <a:t>12/2/20</a:t>
             </a:fld>
             <a:endParaRPr lang="en-US"/>
           </a:p>
@@ -1640,7 +1640,7 @@
           <a:lstStyle/>
           <a:p>
             <a:fld id="{2E3CE03B-8C24-BD41-A48C-B23475D09813}" type="datetimeFigureOut">
-              <a:t>11/5/20</a:t>
+              <a:t>12/2/20</a:t>
             </a:fld>
             <a:endParaRPr lang="en-US"/>
           </a:p>
@@ -1903,7 +1903,7 @@
           <a:lstStyle/>
           <a:p>
             <a:fld id="{2E3CE03B-8C24-BD41-A48C-B23475D09813}" type="datetimeFigureOut">
-              <a:t>11/5/20</a:t>
+              <a:t>12/2/20</a:t>
             </a:fld>
             <a:endParaRPr lang="en-US"/>
           </a:p>
@@ -2313,7 +2313,7 @@
           <a:lstStyle/>
           <a:p>
             <a:fld id="{2E3CE03B-8C24-BD41-A48C-B23475D09813}" type="datetimeFigureOut">
-              <a:t>11/5/20</a:t>
+              <a:t>12/2/20</a:t>
             </a:fld>
             <a:endParaRPr lang="en-US"/>
           </a:p>
@@ -2452,7 +2452,7 @@
           <a:lstStyle/>
           <a:p>
             <a:fld id="{2E3CE03B-8C24-BD41-A48C-B23475D09813}" type="datetimeFigureOut">
-              <a:t>11/5/20</a:t>
+              <a:t>12/2/20</a:t>
             </a:fld>
             <a:endParaRPr lang="en-US"/>
           </a:p>
@@ -2563,7 +2563,7 @@
           <a:lstStyle/>
           <a:p>
             <a:fld id="{2E3CE03B-8C24-BD41-A48C-B23475D09813}" type="datetimeFigureOut">
-              <a:t>11/5/20</a:t>
+              <a:t>12/2/20</a:t>
             </a:fld>
             <a:endParaRPr lang="en-US"/>
           </a:p>
@@ -2872,7 +2872,7 @@
           <a:lstStyle/>
           <a:p>
             <a:fld id="{2E3CE03B-8C24-BD41-A48C-B23475D09813}" type="datetimeFigureOut">
-              <a:t>11/5/20</a:t>
+              <a:t>12/2/20</a:t>
             </a:fld>
             <a:endParaRPr lang="en-US"/>
           </a:p>
@@ -3158,7 +3158,7 @@
           <a:lstStyle/>
           <a:p>
             <a:fld id="{2E3CE03B-8C24-BD41-A48C-B23475D09813}" type="datetimeFigureOut">
-              <a:t>11/5/20</a:t>
+              <a:t>12/2/20</a:t>
             </a:fld>
             <a:endParaRPr lang="en-US"/>
           </a:p>
@@ -3397,7 +3397,7 @@
           </a:lstStyle>
           <a:p>
             <a:fld id="{2E3CE03B-8C24-BD41-A48C-B23475D09813}" type="datetimeFigureOut">
-              <a:t>11/5/20</a:t>
+              <a:t>12/2/20</a:t>
             </a:fld>
             <a:endParaRPr lang="en-US"/>
           </a:p>
@@ -8115,8 +8115,8 @@
           </a:p>
         </p:txBody>
       </p:sp>
-      <mc:AlternateContent xmlns:mc="http://schemas.openxmlformats.org/markup-compatibility/2006">
-        <mc:Choice xmlns:a14="http://schemas.microsoft.com/office/drawing/2010/main" Requires="a14">
+      <mc:AlternateContent xmlns:mc="http://schemas.openxmlformats.org/markup-compatibility/2006" xmlns:a14="http://schemas.microsoft.com/office/drawing/2010/main">
+        <mc:Choice Requires="a14">
           <p:sp>
             <p:nvSpPr>
               <p:cNvPr id="3" name="Content Placeholder 2"/>
@@ -8303,7 +8303,7 @@
             </p:txBody>
           </p:sp>
         </mc:Choice>
-        <mc:Fallback>
+        <mc:Fallback xmlns="">
           <p:sp>
             <p:nvSpPr>
               <p:cNvPr id="3" name="Content Placeholder 2"/>
@@ -13414,6 +13414,12 @@
               <a:t> with </a:t>
             </a:r>
             <a:r>
+              <a:rPr lang="en-US" dirty="0">
+                <a:ea typeface="Cambria Math"/>
+              </a:rPr>
+              <a:t> </a:t>
+            </a:r>
+            <a:r>
               <a:rPr lang="en-US" i="1" dirty="0" err="1"/>
               <a:t>i</a:t>
             </a:r>
@@ -16880,8 +16886,8 @@
           </a:p>
         </p:txBody>
       </p:sp>
-      <mc:AlternateContent xmlns:mc="http://schemas.openxmlformats.org/markup-compatibility/2006" xmlns:a14="http://schemas.microsoft.com/office/drawing/2010/main">
-        <mc:Choice Requires="a14">
+      <mc:AlternateContent xmlns:mc="http://schemas.openxmlformats.org/markup-compatibility/2006">
+        <mc:Choice xmlns:a14="http://schemas.microsoft.com/office/drawing/2010/main" Requires="a14">
           <p:sp>
             <p:nvSpPr>
               <p:cNvPr id="3" name="Content Placeholder 2"/>
@@ -17435,10 +17441,10 @@
                             <m:t>(</m:t>
                           </m:r>
                           <m:r>
-                            <a:rPr lang="fr-CH" i="1">
+                            <a:rPr lang="fr-CH" b="0" i="1">
                               <a:latin typeface="Cambria Math" panose="02040503050406030204" pitchFamily="18" charset="0"/>
                             </a:rPr>
-                            <m:t>𝐹</m:t>
+                            <m:t>𝐸</m:t>
                           </m:r>
                           <m:r>
                             <a:rPr lang="fr-CH" i="1">
@@ -17459,7 +17465,7 @@
             </p:txBody>
           </p:sp>
         </mc:Choice>
-        <mc:Fallback xmlns="">
+        <mc:Fallback>
           <p:sp>
             <p:nvSpPr>
               <p:cNvPr id="3" name="Content Placeholder 2"/>
@@ -23933,8 +23939,8 @@
           </a:p>
         </p:txBody>
       </p:sp>
-      <mc:AlternateContent xmlns:mc="http://schemas.openxmlformats.org/markup-compatibility/2006">
-        <mc:Choice xmlns:a14="http://schemas.microsoft.com/office/drawing/2010/main" Requires="a14">
+      <mc:AlternateContent xmlns:mc="http://schemas.openxmlformats.org/markup-compatibility/2006" xmlns:a14="http://schemas.microsoft.com/office/drawing/2010/main">
+        <mc:Choice Requires="a14">
           <p:sp>
             <p:nvSpPr>
               <p:cNvPr id="3" name="Content Placeholder 2"/>
@@ -24512,7 +24518,7 @@
             </p:txBody>
           </p:sp>
         </mc:Choice>
-        <mc:Fallback>
+        <mc:Fallback xmlns="">
           <p:sp>
             <p:nvSpPr>
               <p:cNvPr id="3" name="Content Placeholder 2"/>
@@ -24605,8 +24611,8 @@
           </a:p>
         </p:txBody>
       </p:sp>
-      <mc:AlternateContent xmlns:mc="http://schemas.openxmlformats.org/markup-compatibility/2006">
-        <mc:Choice xmlns:a14="http://schemas.microsoft.com/office/drawing/2010/main" Requires="a14">
+      <mc:AlternateContent xmlns:mc="http://schemas.openxmlformats.org/markup-compatibility/2006" xmlns:a14="http://schemas.microsoft.com/office/drawing/2010/main">
+        <mc:Choice Requires="a14">
           <p:sp>
             <p:nvSpPr>
               <p:cNvPr id="3" name="Content Placeholder 2">
@@ -25090,7 +25096,7 @@
             </p:txBody>
           </p:sp>
         </mc:Choice>
-        <mc:Fallback>
+        <mc:Fallback xmlns="">
           <p:sp>
             <p:nvSpPr>
               <p:cNvPr id="3" name="Content Placeholder 2">
